--- a/labs/lab12/slides/slides.pptx
+++ b/labs/lab12/slides/slides.pptx
@@ -5,7 +5,7 @@
     <p:sldMasterId id="2147483696" r:id="rId1"/>
   </p:sldMasterIdLst>
   <p:notesMasterIdLst>
-    <p:notesMasterId r:id="rId17"/>
+    <p:notesMasterId r:id="rId19"/>
   </p:notesMasterIdLst>
   <p:sldIdLst>
     <p:sldId id="256" r:id="rId2"/>
@@ -23,6 +23,8 @@
     <p:sldId id="268" r:id="rId14"/>
     <p:sldId id="269" r:id="rId15"/>
     <p:sldId id="270" r:id="rId16"/>
+    <p:sldId id="271" r:id="rId17"/>
+    <p:sldId id="272" r:id="rId18"/>
   </p:sldIdLst>
   <p:sldSz cx="12192000" cy="6858000"/>
   <p:notesSz cx="6858000" cy="9144000"/>
@@ -527,7 +529,7 @@
             </a:pPr>
             <a:r>
               <a:rPr/>
-              <a:t>All three worksheet analyses use the same parent–child file. The between-groups handout matches the walkthrough and the two independent analyses.</a:t>
+              <a:t>Use parent_child_data.sav and the RH1 walkthrough in the Lab 12 worksheet. Keep syntax and Output Viewer open. The guide demonstrates the procedure with other variables; use famtype, tx, and praise here. This walkthrough uses a between-groups design.</a:t>
             </a:r>
           </a:p>
         </p:txBody>
@@ -609,7 +611,7 @@
             </a:pPr>
             <a:r>
               <a:rPr/>
-              <a:t>Simple effects answer a conditional question. Do not list every possible cell comparison when the worksheet requests a particular direction.</a:t>
+              <a:t>The F test assesses the difference; the means show its direction. With a two-level factor, no extra LSD comparison is needed for the marginal means. Use the worksheet’s descriptive-or-misleading question to compare the marginal result with the conditional pattern. Explain any change in the size or direction of the treatment difference.</a:t>
             </a:r>
           </a:p>
         </p:txBody>
@@ -631,7 +633,7 @@
           <a:p>
             <a:fld id="{18BDFEC3-8487-43E8-A154-7C12CBC1FFF2}" type="slidenum">
               <a:rPr lang="en-US"/>
-              <a:t>12</a:t>
+              <a:t>15</a:t>
             </a:fld>
             <a:endParaRPr lang="en-US"/>
           </a:p>
@@ -691,7 +693,7 @@
             </a:pPr>
             <a:r>
               <a:rPr/>
-              <a:t>Neither independent analysis should start with the main effects. Complete the cell and marginal means first so the interaction can be described accurately.</a:t>
+              <a:t>Now switch the direction of comparison: examine family types among untreated mothers, then among treated mothers. Use those simple effects to explain whether the family-type main effect is descriptive or misleading. A significant interaction does not automatically make both main effects misleading.</a:t>
             </a:r>
           </a:p>
         </p:txBody>
@@ -713,7 +715,7 @@
           <a:p>
             <a:fld id="{18BDFEC3-8487-43E8-A154-7C12CBC1FFF2}" type="slidenum">
               <a:rPr lang="en-US"/>
-              <a:t>13</a:t>
+              <a:t>16</a:t>
             </a:fld>
             <a:endParaRPr lang="en-US"/>
           </a:p>
@@ -773,7 +775,7 @@
             </a:pPr>
             <a:r>
               <a:rPr/>
-              <a:t>This output is generated with create_apa_factbg_desc_table(), the factorial reporting function used with the course handout workflow.</a:t>
+              <a:t>Use the worksheet’s response spaces and check all requested fields. Save the syntax and output. The walkthrough does not ask for a separate APA table, figure, or effect-size report, so those are not additional deliverables here.</a:t>
             </a:r>
           </a:p>
         </p:txBody>
@@ -795,89 +797,7 @@
           <a:p>
             <a:fld id="{18BDFEC3-8487-43E8-A154-7C12CBC1FFF2}" type="slidenum">
               <a:rPr lang="en-US"/>
-              <a:t>14</a:t>
-            </a:fld>
-            <a:endParaRPr lang="en-US"/>
-          </a:p>
-        </p:txBody>
-      </p:sp>
-    </p:spTree>
-  </p:cSld>
-</p:notes>
-</file>
-
-<file path=ppt/notesSlides/notesSlide13.xml><?xml version="1.0" encoding="utf-8"?>
-<p:notes xmlns:a="http://schemas.openxmlformats.org/drawingml/2006/main" xmlns:r="http://schemas.openxmlformats.org/officeDocument/2006/relationships" xmlns:p="http://schemas.openxmlformats.org/presentationml/2006/main">
-  <p:cSld>
-    <p:spTree>
-      <p:nvGrpSpPr>
-        <p:cNvPr id="1" name=""/>
-        <p:cNvGrpSpPr/>
-        <p:nvPr/>
-      </p:nvGrpSpPr>
-      <p:grpSpPr>
-        <a:xfrm>
-          <a:off x="0" y="0"/>
-          <a:ext cx="0" cy="0"/>
-          <a:chOff x="0" y="0"/>
-          <a:chExt cx="0" cy="0"/>
-        </a:xfrm>
-      </p:grpSpPr>
-      <p:sp>
-        <p:nvSpPr>
-          <p:cNvPr id="2" name="Slide Image Placeholder 1"/>
-          <p:cNvSpPr>
-            <a:spLocks noGrp="1" noRot="1" noChangeAspect="1"/>
-          </p:cNvSpPr>
-          <p:nvPr>
-            <p:ph type="sldImg"/>
-          </p:nvPr>
-        </p:nvSpPr>
-        <p:spPr/>
-      </p:sp>
-      <p:sp>
-        <p:nvSpPr>
-          <p:cNvPr id="3" name="Notes Placeholder 2"/>
-          <p:cNvSpPr>
-            <a:spLocks noGrp="1"/>
-          </p:cNvSpPr>
-          <p:nvPr>
-            <p:ph type="body" idx="1"/>
-          </p:nvPr>
-        </p:nvSpPr>
-        <p:spPr/>
-        <p:txBody>
-          <a:bodyPr/>
-          <a:lstStyle/>
-          <a:p>
-            <a:pPr lvl="0" indent="0" marL="0">
-              <a:buNone/>
-            </a:pPr>
-            <a:r>
-              <a:rPr/>
-              <a:t>The final write-up should include F, both degrees of freedom, p, MSe, and effect size for each reported effect. Explain whether each main effect is descriptive or misleading.</a:t>
-            </a:r>
-          </a:p>
-        </p:txBody>
-      </p:sp>
-      <p:sp>
-        <p:nvSpPr>
-          <p:cNvPr id="4" name="Slide Number Placeholder 3"/>
-          <p:cNvSpPr>
-            <a:spLocks noGrp="1"/>
-          </p:cNvSpPr>
-          <p:nvPr>
-            <p:ph type="sldNum" sz="quarter" idx="10"/>
-          </p:nvPr>
-        </p:nvSpPr>
-        <p:spPr/>
-        <p:txBody>
-          <a:bodyPr/>
-          <a:lstStyle/>
-          <a:p>
-            <a:fld id="{18BDFEC3-8487-43E8-A154-7C12CBC1FFF2}" type="slidenum">
-              <a:rPr lang="en-US"/>
-              <a:t>15</a:t>
+              <a:t>17</a:t>
             </a:fld>
             <a:endParaRPr lang="en-US"/>
           </a:p>
@@ -937,7 +857,7 @@
             </a:pPr>
             <a:r>
               <a:rPr/>
-              <a:t>Keep the dataset and saved syntax open together. Inspect variables and cases in the Data Editor; reproduce every command in the Syntax Editor.</a:t>
+              <a:t>Each mother–child pair belongs to one cell. Family type and treatment status are both between-groups variables; praise is the number of praise statements during the play session. Identify the three effects before running the analysis.</a:t>
             </a:r>
           </a:p>
         </p:txBody>
@@ -959,7 +879,7 @@
           <a:p>
             <a:fld id="{18BDFEC3-8487-43E8-A154-7C12CBC1FFF2}" type="slidenum">
               <a:rPr lang="en-US"/>
-              <a:t>3</a:t>
+              <a:t>5</a:t>
             </a:fld>
             <a:endParaRPr lang="en-US"/>
           </a:p>
@@ -1019,7 +939,7 @@
             </a:pPr>
             <a:r>
               <a:rPr/>
-              <a:t>The Output Viewer accumulates tables, charts, warnings, and processing notes. Keep it open beside the data and syntax windows, and export only the results needed for the worksheet or report.</a:t>
+              <a:t>These diagrams illustrate patterns, not the parent–child data. Lines need not cross for an interaction: the difference can grow or shrink while keeping the same direction. Use the interaction test to assess the evidence, then use the cell means to describe the pattern.</a:t>
             </a:r>
           </a:p>
         </p:txBody>
@@ -1041,7 +961,7 @@
           <a:p>
             <a:fld id="{18BDFEC3-8487-43E8-A154-7C12CBC1FFF2}" type="slidenum">
               <a:rPr lang="en-US"/>
-              <a:t>4</a:t>
+              <a:t>7</a:t>
             </a:fld>
             <a:endParaRPr lang="en-US"/>
           </a:p>
@@ -1101,7 +1021,7 @@
             </a:pPr>
             <a:r>
               <a:rPr/>
-              <a:t>Students need all four cell means and both sets of model-predicted marginal means. These are not raw means weighted by the observed cell sizes. State whether each predictor is between- or within-groups before selecting the procedure.</a:t>
+              <a:t>No recode or case selection is required. Check famtype: 1 = 2-parent family, 2 = mother-only family; tx: 0 = no treatment, 1 = treatment. The download has 147 records, and SPSS excludes any case missing a variable used in the model. Keep the declared missing-value codes out of the analysis.</a:t>
             </a:r>
           </a:p>
         </p:txBody>
@@ -1123,7 +1043,7 @@
           <a:p>
             <a:fld id="{18BDFEC3-8487-43E8-A154-7C12CBC1FFF2}" type="slidenum">
               <a:rPr lang="en-US"/>
-              <a:t>6</a:t>
+              <a:t>8</a:t>
             </a:fld>
             <a:endParaRPr lang="en-US"/>
           </a:p>
@@ -1183,7 +1103,7 @@
             </a:pPr>
             <a:r>
               <a:rPr/>
-              <a:t>The interaction is the conditional effect. Read it before deciding whether either marginal main effect is a useful summary.</a:t>
+              <a:t>The model includes both main effects and their interaction. The EMMEANS request provides the four cell means. Average the corresponding cell means to complete the worksheet margins. In the ANOVA output, read famtype by tx before the two main-effect rows.</a:t>
             </a:r>
           </a:p>
         </p:txBody>
@@ -1205,7 +1125,7 @@
           <a:p>
             <a:fld id="{18BDFEC3-8487-43E8-A154-7C12CBC1FFF2}" type="slidenum">
               <a:rPr lang="en-US"/>
-              <a:t>7</a:t>
+              <a:t>9</a:t>
             </a:fld>
             <a:endParaRPr lang="en-US"/>
           </a:p>
@@ -1265,7 +1185,7 @@
             </a:pPr>
             <a:r>
               <a:rPr/>
-              <a:t>Interpret the interaction before either main effect. A strong interaction can make marginal main effects misleading.</a:t>
+              <a:t>For each worksheet margin, add the two corresponding cell means and divide by two. This matches the model’s estimated marginal means. Raw totals in a descriptive table may weight cells by their sample sizes and can differ from the checker. Use the Excel Computator later for the LSD minimum mean difference. Save the comparison symbols for that step.</a:t>
             </a:r>
           </a:p>
         </p:txBody>
@@ -1287,7 +1207,7 @@
           <a:p>
             <a:fld id="{18BDFEC3-8487-43E8-A154-7C12CBC1FFF2}" type="slidenum">
               <a:rPr lang="en-US"/>
-              <a:t>8</a:t>
+              <a:t>10</a:t>
             </a:fld>
             <a:endParaRPr lang="en-US"/>
           </a:p>
@@ -1347,7 +1267,7 @@
             </a:pPr>
             <a:r>
               <a:rPr/>
-              <a:t>No transformation or selection is required. Confirm value labels for famtype and tx, check missing values, and verify that praise is quantitative.</a:t>
+              <a:t>The image labels the variables family_type and treatment; these correspond to famtype and tx in the download. Use the family_type by treatment row for the interaction and the Error row for MSe and the error degrees of freedom. Decide whether the interaction warrants comparing cell means before interpreting the main effects.</a:t>
             </a:r>
           </a:p>
         </p:txBody>
@@ -1369,7 +1289,7 @@
           <a:p>
             <a:fld id="{18BDFEC3-8487-43E8-A154-7C12CBC1FFF2}" type="slidenum">
               <a:rPr lang="en-US"/>
-              <a:t>9</a:t>
+              <a:t>12</a:t>
             </a:fld>
             <a:endParaRPr lang="en-US"/>
           </a:p>
@@ -1429,7 +1349,7 @@
             </a:pPr>
             <a:r>
               <a:rPr/>
-              <a:t>Record the four cell means before interpreting the table. In the ANOVA output, read famtype by tx before the two main-effect rows.</a:t>
+              <a:t>Use the LSD-HSD tab and the worksheet’s number of conditions, average cell size, error df, and MSe. The worksheet/checker use a common approximate cutoff; the updated guide explains pair-specific cutoffs for unequal cell sizes. Follow the worksheet method for its answer fields. These treatment comparisons are the simple effects requested for the interaction write-up. Complete the other comparison fields needed to interpret the family-type main effect too.</a:t>
             </a:r>
           </a:p>
         </p:txBody>
@@ -1451,7 +1371,7 @@
           <a:p>
             <a:fld id="{18BDFEC3-8487-43E8-A154-7C12CBC1FFF2}" type="slidenum">
               <a:rPr lang="en-US"/>
-              <a:t>10</a:t>
+              <a:t>13</a:t>
             </a:fld>
             <a:endParaRPr lang="en-US"/>
           </a:p>
@@ -1511,7 +1431,7 @@
             </a:pPr>
             <a:r>
               <a:rPr/>
-              <a:t>The interaction is significant, so interpret it before treating either main effect as a complete summary.</a:t>
+              <a:t>Use the cell means and comparison results to describe the interaction. State which group has the higher mean and whether the comparison is significant. Keep the focus on treatment within each family type, as the worksheet requests. A significant interaction alone does not describe its direction or pattern.</a:t>
             </a:r>
           </a:p>
         </p:txBody>
@@ -1533,7 +1453,7 @@
           <a:p>
             <a:fld id="{18BDFEC3-8487-43E8-A154-7C12CBC1FFF2}" type="slidenum">
               <a:rPr lang="en-US"/>
-              <a:t>11</a:t>
+              <a:t>14</a:t>
             </a:fld>
             <a:endParaRPr lang="en-US"/>
           </a:p>
@@ -2802,8 +2722,8 @@
         </p:nvSpPr>
         <p:spPr>
           <a:xfrm>
-            <a:off x="1583436" y="2313433"/>
-            <a:ext cx="4270248" cy="704087"/>
+            <a:off x="1097280" y="2313433"/>
+            <a:ext cx="4907280" cy="548640"/>
           </a:xfrm>
         </p:spPr>
         <p:txBody>
@@ -2875,8 +2795,8 @@
         </p:nvSpPr>
         <p:spPr>
           <a:xfrm>
-            <a:off x="1583436" y="3143250"/>
-            <a:ext cx="4270248" cy="2596776"/>
+            <a:off x="1097280" y="2926080"/>
+            <a:ext cx="4907280" cy="3177540"/>
           </a:xfrm>
         </p:spPr>
         <p:txBody>
@@ -2932,8 +2852,8 @@
         </p:nvSpPr>
         <p:spPr>
           <a:xfrm>
-            <a:off x="6338316" y="3143250"/>
-            <a:ext cx="4253484" cy="2596776"/>
+            <a:off x="6187440" y="2926080"/>
+            <a:ext cx="4907280" cy="3177540"/>
           </a:xfrm>
         </p:spPr>
         <p:txBody>
@@ -2993,8 +2913,8 @@
         </p:nvSpPr>
         <p:spPr>
           <a:xfrm>
-            <a:off x="6338316" y="2313433"/>
-            <a:ext cx="4270248" cy="704087"/>
+            <a:off x="6187440" y="2313433"/>
+            <a:ext cx="4907280" cy="548640"/>
           </a:xfrm>
         </p:spPr>
         <p:txBody>
@@ -3129,7 +3049,12 @@
             <p:ph type="title"/>
           </p:nvPr>
         </p:nvSpPr>
-        <p:spPr/>
+        <p:spPr>
+          <a:xfrm>
+            <a:off x="1097280" y="964692"/>
+            <a:ext cx="9997440" cy="1188720"/>
+          </a:xfrm>
+        </p:spPr>
         <p:txBody>
           <a:bodyPr/>
           <a:lstStyle/>
@@ -4814,7 +4739,7 @@
             </a:pPr>
             <a:r>
               <a:rPr/>
-              <a:t>8 Run the RH1 model</a:t>
+              <a:t>6 Complete the cell and marginal means</a:t>
             </a:r>
           </a:p>
         </p:txBody>
@@ -4834,19 +4759,42 @@
           <a:bodyPr/>
           <a:lstStyle/>
           <a:p>
-            <a:pPr lvl="0" indent="0">
+            <a:pPr lvl="0" indent="0" marL="0">
               <a:buNone/>
             </a:pPr>
             <a:r>
-              <a:rPr>
-                <a:latin typeface="Courier"/>
-              </a:rPr>
-              <a:t>UNIANOVA praise BY famtype tx
-  /METHOD=SSTYPE(3)
-  /PRINT=DESCRIPTIVE ETASQ
-  /EMMEANS=TABLES(famtype*tx)
-  /PLOT=PROFILE(famtype*tx)
-  /CRITERIA=ALPHA(.05).</a:t>
+              <a:rPr/>
+              <a:t>[RH1 · Step 2]</a:t>
+            </a:r>
+          </a:p>
+          <a:p>
+            <a:pPr lvl="0"/>
+            <a:r>
+              <a:rPr/>
+              <a:t>Enter the four cell means in the worksheet</a:t>
+            </a:r>
+          </a:p>
+          <a:p>
+            <a:pPr lvl="0"/>
+            <a:r>
+              <a:rPr/>
+              <a:t>Average across treatment levels for each family type</a:t>
+            </a:r>
+          </a:p>
+          <a:p>
+            <a:pPr lvl="0"/>
+            <a:r>
+              <a:rPr/>
+              <a:t>Average across family types for each treatment level</a:t>
+            </a:r>
+          </a:p>
+          <a:p>
+            <a:pPr lvl="0" indent="0" marL="0">
+              <a:buNone/>
+            </a:pPr>
+            <a:r>
+              <a:rPr b="1"/>
+              <a:t>Marginal means give equal weight to the other factor’s two levels</a:t>
             </a:r>
           </a:p>
         </p:txBody>
@@ -4898,21 +4846,21 @@
             </a:pPr>
             <a:r>
               <a:rPr/>
-              <a:t>9 Start with the family type × treatment row</a:t>
+              <a:t>7 Read the interaction first</a:t>
             </a:r>
           </a:p>
         </p:txBody>
       </p:sp>
       <p:pic>
         <p:nvPicPr>
-          <p:cNvPr descr="SPSS-style factorial ANOVA output for praise by family type and treatment, showing significant family-type and treatment main effects and a significant family-type by treatment interaction" id="0" name="Picture 1"/>
+          <p:cNvPr descr="Type III tests for praise. Family type: F 19.585, df 1, p below .001. Treatment: F 60.678, df 1, p below .001. Family type by treatment: F 8.684, df 1, p .004. Error: df 142 and mean square 3.821." id="0" name="Picture 1"/>
           <p:cNvPicPr>
             <a:picLocks noGrp="1" noChangeAspect="1"/>
           </p:cNvPicPr>
           <p:nvPr/>
         </p:nvPicPr>
         <p:blipFill>
-          <a:blip r:embed="rId3"/>
+          <a:blip r:embed="rId2"/>
           <a:stretch>
             <a:fillRect/>
           </a:stretch>
@@ -4980,7 +4928,7 @@
             </a:pPr>
             <a:r>
               <a:rPr/>
-              <a:t>10 Probe the interaction</a:t>
+              <a:t>7 Read the interaction first (continued)</a:t>
             </a:r>
           </a:p>
         </p:txBody>
@@ -5000,39 +4948,40 @@
           <a:bodyPr/>
           <a:lstStyle/>
           <a:p>
-            <a:pPr lvl="0" indent="-457200" marL="457200">
-              <a:buAutoNum type="arabicPeriod"/>
+            <a:pPr lvl="0" indent="0" marL="0">
+              <a:buNone/>
             </a:pPr>
             <a:r>
-              <a:rPr/>
-              <a:t>Describe how treatment changes within each family type.</a:t>
-            </a:r>
-          </a:p>
-          <a:p>
-            <a:pPr lvl="0" indent="-457200" marL="457200">
-              <a:buAutoNum type="arabicPeriod"/>
-            </a:pPr>
-            <a:r>
-              <a:rPr/>
-              <a:t>Compute the worksheet’s LSD minimum mean difference if needed.</a:t>
-            </a:r>
-          </a:p>
-          <a:p>
-            <a:pPr lvl="0" indent="-457200" marL="457200">
-              <a:buAutoNum type="arabicPeriod"/>
-            </a:pPr>
-            <a:r>
-              <a:rPr/>
-              <a:t>Evaluate the requested simple effects.</a:t>
-            </a:r>
-          </a:p>
-          <a:p>
-            <a:pPr lvl="0" indent="-457200" marL="457200">
-              <a:buAutoNum type="arabicPeriod"/>
-            </a:pPr>
-            <a:r>
-              <a:rPr/>
-              <a:t>Decide whether each main effect is descriptive or misleading.</a:t>
+              <a:rPr b="1"/>
+              <a:t>Identify the interaction’s </a:t>
+            </a:r>
+            <a:r>
+              <a:rPr b="1" i="1"/>
+              <a:t>F</a:t>
+            </a:r>
+            <a:r>
+              <a:rPr b="1"/>
+              <a:t>, both </a:t>
+            </a:r>
+            <a:r>
+              <a:rPr b="1" i="1"/>
+              <a:t>df</a:t>
+            </a:r>
+            <a:r>
+              <a:rPr b="1"/>
+              <a:t>, </a:t>
+            </a:r>
+            <a:r>
+              <a:rPr b="1" i="1"/>
+              <a:t>p</a:t>
+            </a:r>
+            <a:r>
+              <a:rPr b="1"/>
+              <a:t>, and </a:t>
+            </a:r>
+            <a:r>
+              <a:rPr b="1" i="1"/>
+              <a:t>MSe</a:t>
             </a:r>
           </a:p>
         </p:txBody>
@@ -5084,7 +5033,7 @@
             </a:pPr>
             <a:r>
               <a:rPr/>
-              <a:t>11 Repeat the model twice</a:t>
+              <a:t>8 Compare treatment within each family type</a:t>
             </a:r>
           </a:p>
         </p:txBody>
@@ -5104,42 +5053,42 @@
           <a:bodyPr/>
           <a:lstStyle/>
           <a:p>
+            <a:pPr lvl="0" indent="0" marL="0">
+              <a:buNone/>
+            </a:pPr>
+            <a:r>
+              <a:rPr>
+                <a:hlinkClick r:id="rId3"/>
+              </a:rPr>
+              <a:t>Computator workbook</a:t>
+            </a:r>
+          </a:p>
+          <a:p>
             <a:pPr lvl="0"/>
             <a:r>
-              <a:rPr b="1"/>
-              <a:t>RH2:</a:t>
-            </a:r>
-            <a:r>
               <a:rPr/>
-              <a:t> mother’s age group × child’s age group → direct commands</a:t>
+              <a:t>Calculate the worksheet’s LSD minimum mean difference</a:t>
             </a:r>
           </a:p>
           <a:p>
             <a:pPr lvl="0"/>
             <a:r>
-              <a:rPr b="1"/>
-              <a:t>RH3:</a:t>
-            </a:r>
-            <a:r>
               <a:rPr/>
-              <a:t> treatment status × child’s age group → negative feedback</a:t>
-            </a:r>
-          </a:p>
-          <a:p>
-            <a:pPr lvl="0" indent="0" marL="0">
-              <a:buNone/>
-            </a:pPr>
+              <a:t>Compare treatment with no treatment within 2-parent families</a:t>
+            </a:r>
+          </a:p>
+          <a:p>
+            <a:pPr lvl="0"/>
             <a:r>
               <a:rPr/>
-              <a:t>Use the same order: </a:t>
-            </a:r>
-            <a:r>
-              <a:rPr b="1"/>
-              <a:t>means → interaction → simple effects → main effects</a:t>
-            </a:r>
+              <a:t>Repeat within mother-only families</a:t>
+            </a:r>
+          </a:p>
+          <a:p>
+            <a:pPr lvl="0"/>
             <a:r>
               <a:rPr/>
-              <a:t>.</a:t>
+              <a:t>Enter the comparison symbols in the worksheet</a:t>
             </a:r>
           </a:p>
         </p:txBody>
@@ -5191,41 +5140,85 @@
             </a:pPr>
             <a:r>
               <a:rPr/>
-              <a:t>12 Make the APA cell table</a:t>
-            </a:r>
-          </a:p>
-        </p:txBody>
-      </p:sp>
-      <p:pic>
-        <p:nvPicPr>
-          <p:cNvPr descr="APA-style table showing praise descriptives for the four combinations of family type and treatment status" id="0" name="Picture 1"/>
-          <p:cNvPicPr>
-            <a:picLocks noGrp="1" noChangeAspect="1"/>
-          </p:cNvPicPr>
-          <p:nvPr/>
-        </p:nvPicPr>
-        <p:blipFill>
-          <a:blip r:embed="rId3"/>
-          <a:stretch>
-            <a:fillRect/>
-          </a:stretch>
-        </p:blipFill>
-        <p:spPr bwMode="auto">
-          <a:xfrm>
-            <a:off x="2133600" y="2628900"/>
-            <a:ext cx="7899400" cy="3098800"/>
-          </a:xfrm>
-          <a:prstGeom prst="rect">
-            <a:avLst/>
-          </a:prstGeom>
-          <a:noFill/>
-          <a:ln w="9525">
-            <a:noFill/>
-            <a:headEnd/>
-            <a:tailEnd/>
-          </a:ln>
-        </p:spPr>
-      </p:pic>
+              <a:t>9 Write the interaction result</a:t>
+            </a:r>
+          </a:p>
+        </p:txBody>
+      </p:sp>
+      <p:sp>
+        <p:nvSpPr>
+          <p:cNvPr id="3" name="Content Placeholder 2"/>
+          <p:cNvSpPr>
+            <a:spLocks noGrp="1"/>
+          </p:cNvSpPr>
+          <p:nvPr>
+            <p:ph idx="1"/>
+          </p:nvPr>
+        </p:nvSpPr>
+        <p:spPr/>
+        <p:txBody>
+          <a:bodyPr/>
+          <a:lstStyle/>
+          <a:p>
+            <a:pPr lvl="0" indent="0" marL="0">
+              <a:buNone/>
+            </a:pPr>
+            <a:r>
+              <a:rPr/>
+              <a:t>[RH1 · Interaction write-up]</a:t>
+            </a:r>
+          </a:p>
+          <a:p>
+            <a:pPr lvl="0"/>
+            <a:r>
+              <a:rPr/>
+              <a:t>Report </a:t>
+            </a:r>
+            <a:r>
+              <a:rPr i="1"/>
+              <a:t>F</a:t>
+            </a:r>
+            <a:r>
+              <a:rPr/>
+              <a:t>, both </a:t>
+            </a:r>
+            <a:r>
+              <a:rPr i="1"/>
+              <a:t>df</a:t>
+            </a:r>
+            <a:r>
+              <a:rPr/>
+              <a:t>, </a:t>
+            </a:r>
+            <a:r>
+              <a:rPr i="1"/>
+              <a:t>p</a:t>
+            </a:r>
+            <a:r>
+              <a:rPr/>
+              <a:t>, and </a:t>
+            </a:r>
+            <a:r>
+              <a:rPr i="1"/>
+              <a:t>MSe</a:t>
+            </a:r>
+          </a:p>
+          <a:p>
+            <a:pPr lvl="0"/>
+            <a:r>
+              <a:rPr/>
+              <a:t>Describe treatment’s effect within each family type</a:t>
+            </a:r>
+          </a:p>
+          <a:p>
+            <a:pPr lvl="0"/>
+            <a:r>
+              <a:rPr/>
+              <a:t>Explain how those two comparisons differ</a:t>
+            </a:r>
+          </a:p>
+        </p:txBody>
+      </p:sp>
     </p:spTree>
   </p:cSld>
 </p:sld>
@@ -5273,7 +5266,7 @@
             </a:pPr>
             <a:r>
               <a:rPr/>
-              <a:t>13 Write the factorial result</a:t>
+              <a:t>10 Interpret the treatment main effect</a:t>
             </a:r>
           </a:p>
         </p:txBody>
@@ -5293,48 +5286,283 @@
           <a:bodyPr/>
           <a:lstStyle/>
           <a:p>
-            <a:pPr lvl="0" indent="-457200" marL="457200">
-              <a:buAutoNum type="arabicPeriod"/>
+            <a:pPr lvl="0"/>
+            <a:r>
+              <a:rPr/>
+              <a:t>Read the treatment row: </a:t>
+            </a:r>
+            <a:r>
+              <a:rPr i="1"/>
+              <a:t>F</a:t>
+            </a:r>
+            <a:r>
+              <a:rPr/>
+              <a:t>, both </a:t>
+            </a:r>
+            <a:r>
+              <a:rPr i="1"/>
+              <a:t>df</a:t>
+            </a:r>
+            <a:r>
+              <a:rPr/>
+              <a:t>, </a:t>
+            </a:r>
+            <a:r>
+              <a:rPr i="1"/>
+              <a:t>p</a:t>
+            </a:r>
+            <a:r>
+              <a:rPr/>
+              <a:t>, and </a:t>
+            </a:r>
+            <a:r>
+              <a:rPr i="1"/>
+              <a:t>MSe</a:t>
+            </a:r>
+          </a:p>
+          <a:p>
+            <a:pPr lvl="0"/>
+            <a:r>
+              <a:rPr/>
+              <a:t>Compare the two treatment marginal means</a:t>
+            </a:r>
+          </a:p>
+          <a:p>
+            <a:pPr lvl="0"/>
+            <a:r>
+              <a:rPr/>
+              <a:t>Check treatment’s simple effects within each family type</a:t>
+            </a:r>
+          </a:p>
+          <a:p>
+            <a:pPr lvl="0" indent="0" marL="0">
+              <a:buNone/>
             </a:pPr>
             <a:r>
+              <a:rPr b="1"/>
+              <a:t>Is the marginal summary descriptive or misleading?</a:t>
+            </a:r>
+          </a:p>
+        </p:txBody>
+      </p:sp>
+    </p:spTree>
+  </p:cSld>
+</p:sld>
+</file>
+
+<file path=ppt/slides/slide16.xml><?xml version="1.0" encoding="utf-8"?>
+<p:sld xmlns:a="http://schemas.openxmlformats.org/drawingml/2006/main" xmlns:r="http://schemas.openxmlformats.org/officeDocument/2006/relationships" xmlns:p="http://schemas.openxmlformats.org/presentationml/2006/main">
+  <p:cSld>
+    <p:spTree>
+      <p:nvGrpSpPr>
+        <p:cNvPr id="1" name=""/>
+        <p:cNvGrpSpPr/>
+        <p:nvPr/>
+      </p:nvGrpSpPr>
+      <p:grpSpPr>
+        <a:xfrm>
+          <a:off x="0" y="0"/>
+          <a:ext cx="0" cy="0"/>
+          <a:chOff x="0" y="0"/>
+          <a:chExt cx="0" cy="0"/>
+        </a:xfrm>
+      </p:grpSpPr>
+      <p:sp>
+        <p:nvSpPr>
+          <p:cNvPr id="2" name="Title 1"/>
+          <p:cNvSpPr>
+            <a:spLocks noGrp="1"/>
+          </p:cNvSpPr>
+          <p:nvPr>
+            <p:ph type="title"/>
+          </p:nvPr>
+        </p:nvSpPr>
+        <p:spPr>
+          <a:xfrm>
+            <a:off x="1097280" y="964692"/>
+            <a:ext cx="9997440" cy="1188720"/>
+          </a:xfrm>
+        </p:spPr>
+        <p:txBody>
+          <a:bodyPr/>
+          <a:lstStyle/>
+          <a:p>
+            <a:pPr lvl="0" indent="0" marL="0">
+              <a:buNone/>
+            </a:pPr>
+            <a:r>
               <a:rPr/>
-              <a:t>Refer to the four-cell table or plot.</a:t>
-            </a:r>
-          </a:p>
-          <a:p>
-            <a:pPr lvl="0" indent="-457200" marL="457200">
-              <a:buAutoNum type="arabicPeriod"/>
+              <a:t>11 Interpret the family-type main effect</a:t>
+            </a:r>
+          </a:p>
+        </p:txBody>
+      </p:sp>
+      <p:sp>
+        <p:nvSpPr>
+          <p:cNvPr id="3" name="Content Placeholder 2"/>
+          <p:cNvSpPr>
+            <a:spLocks noGrp="1"/>
+          </p:cNvSpPr>
+          <p:nvPr>
+            <p:ph idx="1"/>
+          </p:nvPr>
+        </p:nvSpPr>
+        <p:spPr/>
+        <p:txBody>
+          <a:bodyPr/>
+          <a:lstStyle/>
+          <a:p>
+            <a:pPr lvl="0"/>
+            <a:r>
+              <a:rPr/>
+              <a:t>Read the family-type row: </a:t>
+            </a:r>
+            <a:r>
+              <a:rPr i="1"/>
+              <a:t>F</a:t>
+            </a:r>
+            <a:r>
+              <a:rPr/>
+              <a:t>, both </a:t>
+            </a:r>
+            <a:r>
+              <a:rPr i="1"/>
+              <a:t>df</a:t>
+            </a:r>
+            <a:r>
+              <a:rPr/>
+              <a:t>, </a:t>
+            </a:r>
+            <a:r>
+              <a:rPr i="1"/>
+              <a:t>p</a:t>
+            </a:r>
+            <a:r>
+              <a:rPr/>
+              <a:t>, and </a:t>
+            </a:r>
+            <a:r>
+              <a:rPr i="1"/>
+              <a:t>MSe</a:t>
+            </a:r>
+          </a:p>
+          <a:p>
+            <a:pPr lvl="0"/>
+            <a:r>
+              <a:rPr/>
+              <a:t>Compare the two family-type marginal means</a:t>
+            </a:r>
+          </a:p>
+          <a:p>
+            <a:pPr lvl="0"/>
+            <a:r>
+              <a:rPr/>
+              <a:t>Compare family types within each treatment status</a:t>
+            </a:r>
+          </a:p>
+          <a:p>
+            <a:pPr lvl="0" indent="0" marL="0">
+              <a:buNone/>
             </a:pPr>
             <a:r>
+              <a:rPr b="1"/>
+              <a:t>Does the marginal result describe both comparisons?</a:t>
+            </a:r>
+          </a:p>
+        </p:txBody>
+      </p:sp>
+    </p:spTree>
+  </p:cSld>
+</p:sld>
+</file>
+
+<file path=ppt/slides/slide17.xml><?xml version="1.0" encoding="utf-8"?>
+<p:sld xmlns:a="http://schemas.openxmlformats.org/drawingml/2006/main" xmlns:r="http://schemas.openxmlformats.org/officeDocument/2006/relationships" xmlns:p="http://schemas.openxmlformats.org/presentationml/2006/main">
+  <p:cSld>
+    <p:spTree>
+      <p:nvGrpSpPr>
+        <p:cNvPr id="1" name=""/>
+        <p:cNvGrpSpPr/>
+        <p:nvPr/>
+      </p:nvGrpSpPr>
+      <p:grpSpPr>
+        <a:xfrm>
+          <a:off x="0" y="0"/>
+          <a:ext cx="0" cy="0"/>
+          <a:chOff x="0" y="0"/>
+          <a:chExt cx="0" cy="0"/>
+        </a:xfrm>
+      </p:grpSpPr>
+      <p:sp>
+        <p:nvSpPr>
+          <p:cNvPr id="2" name="Title 1"/>
+          <p:cNvSpPr>
+            <a:spLocks noGrp="1"/>
+          </p:cNvSpPr>
+          <p:nvPr>
+            <p:ph type="title"/>
+          </p:nvPr>
+        </p:nvSpPr>
+        <p:spPr>
+          <a:xfrm>
+            <a:off x="1097280" y="964692"/>
+            <a:ext cx="9997440" cy="1188720"/>
+          </a:xfrm>
+        </p:spPr>
+        <p:txBody>
+          <a:bodyPr/>
+          <a:lstStyle/>
+          <a:p>
+            <a:pPr lvl="0" indent="0" marL="0">
+              <a:buNone/>
+            </a:pPr>
+            <a:r>
               <a:rPr/>
-              <a:t>Describe and report the interaction.</a:t>
-            </a:r>
-          </a:p>
-          <a:p>
-            <a:pPr lvl="0" indent="-457200" marL="457200">
-              <a:buAutoNum type="arabicPeriod"/>
-            </a:pPr>
+              <a:t>12 Finish the RH1 worksheet</a:t>
+            </a:r>
+          </a:p>
+        </p:txBody>
+      </p:sp>
+      <p:sp>
+        <p:nvSpPr>
+          <p:cNvPr id="3" name="Content Placeholder 2"/>
+          <p:cNvSpPr>
+            <a:spLocks noGrp="1"/>
+          </p:cNvSpPr>
+          <p:nvPr>
+            <p:ph idx="1"/>
+          </p:nvPr>
+        </p:nvSpPr>
+        <p:spPr/>
+        <p:txBody>
+          <a:bodyPr/>
+          <a:lstStyle/>
+          <a:p>
+            <a:pPr lvl="0"/>
             <a:r>
               <a:rPr/>
-              <a:t>Report the requested simple effects.</a:t>
-            </a:r>
-          </a:p>
-          <a:p>
-            <a:pPr lvl="0" indent="-457200" marL="457200">
-              <a:buAutoNum type="arabicPeriod"/>
-            </a:pPr>
+              <a:t>Complete the means, comparison symbols, and test statistics</a:t>
+            </a:r>
+          </a:p>
+          <a:p>
+            <a:pPr lvl="0"/>
             <a:r>
               <a:rPr/>
-              <a:t>Report and qualify both main effects.</a:t>
-            </a:r>
-          </a:p>
-          <a:p>
-            <a:pPr lvl="0" indent="-457200" marL="457200">
-              <a:buAutoNum type="arabicPeriod"/>
-            </a:pPr>
+              <a:t>Explain the interaction and both main effects</a:t>
+            </a:r>
+          </a:p>
+          <a:p>
+            <a:pPr lvl="0"/>
             <a:r>
               <a:rPr/>
-              <a:t>Add the all-green checker screenshots.</a:t>
+              <a:t>Justify the descriptive-or-misleading decisions</a:t>
+            </a:r>
+          </a:p>
+          <a:p>
+            <a:pPr lvl="0"/>
+            <a:r>
+              <a:rPr/>
+              <a:t>Add the required checker screenshot</a:t>
             </a:r>
           </a:p>
         </p:txBody>
@@ -5386,14 +5614,14 @@
             </a:pPr>
             <a:r>
               <a:rPr/>
-              <a:t>1 Download the Lab 12 files</a:t>
-            </a:r>
-          </a:p>
-        </p:txBody>
-      </p:sp>
-      <p:sp>
-        <p:nvSpPr>
-          <p:cNvPr id="1001" name="card-steel" descr="card: Worksheet. Download worksheet"/>
+              <a:t>1 Open the Lab 12 files</a:t>
+            </a:r>
+          </a:p>
+        </p:txBody>
+      </p:sp>
+      <p:sp>
+        <p:nvSpPr>
+          <p:cNvPr id="1001" name="card-steel" descr="card: Walkthrough data. Parent–child data"/>
           <p:cNvSpPr/>
           <p:nvPr/>
         </p:nvSpPr>
@@ -5429,7 +5657,7 @@
                   <a:srgbClr val="010B13"/>
                 </a:solidFill>
               </a:rPr>
-              <a:t>Worksheet</a:t>
+              <a:t>Walkthrough data</a:t>
             </a:r>
           </a:p>
           <a:p>
@@ -5441,14 +5669,20 @@
                 </a:solidFill>
                 <a:hlinkClick r:id="rId3"/>
               </a:rPr>
-              <a:t>Download worksheet</a:t>
-            </a:r>
-          </a:p>
-        </p:txBody>
-      </p:sp>
-      <p:sp>
-        <p:nvSpPr>
-          <p:cNvPr id="1002" name="card-rail" descr=""/>
+              <a:t>Parent–child data</a:t>
+            </a:r>
+          </a:p>
+        </p:txBody>
+      </p:sp>
+      <p:sp>
+        <p:nvSpPr>
+          <p:cNvPr id="1002" name="card-rail" descr="">
+            <a:extLst>
+              <a:ext uri="{C183D7F6-B498-43B3-948B-1728B52AA6E4}">
+                <adec:decorative xmlns:adec="http://schemas.microsoft.com/office/drawing/2017/decorative" val="1"/>
+              </a:ext>
+            </a:extLst>
+          </p:cNvPr>
           <p:cNvSpPr/>
           <p:nvPr/>
         </p:nvSpPr>
@@ -5479,7 +5713,7 @@
       </p:sp>
       <p:sp>
         <p:nvSpPr>
-          <p:cNvPr id="1003" name="card-steel" descr="card: Dataset. Download parent–child data"/>
+          <p:cNvPr id="1003" name="card-steel" descr="card: Simple SPSS guide. 2 × 2 between-groups PDF"/>
           <p:cNvSpPr/>
           <p:nvPr/>
         </p:nvSpPr>
@@ -5515,7 +5749,7 @@
                   <a:srgbClr val="010B13"/>
                 </a:solidFill>
               </a:rPr>
-              <a:t>Dataset</a:t>
+              <a:t>Simple SPSS guide</a:t>
             </a:r>
           </a:p>
           <a:p>
@@ -5527,204 +5761,26 @@
                 </a:solidFill>
                 <a:hlinkClick r:id="rId4"/>
               </a:rPr>
-              <a:t>Download parent–child data</a:t>
-            </a:r>
-          </a:p>
-        </p:txBody>
-      </p:sp>
-      <p:sp>
-        <p:nvSpPr>
-          <p:cNvPr id="1004" name="card-rail" descr=""/>
+              <a:t>2 × 2 between-groups PDF</a:t>
+            </a:r>
+          </a:p>
+        </p:txBody>
+      </p:sp>
+      <p:sp>
+        <p:nvSpPr>
+          <p:cNvPr id="1004" name="card-rail" descr="">
+            <a:extLst>
+              <a:ext uri="{C183D7F6-B498-43B3-948B-1728B52AA6E4}">
+                <adec:decorative xmlns:adec="http://schemas.microsoft.com/office/drawing/2017/decorative" val="1"/>
+              </a:ext>
+            </a:extLst>
+          </p:cNvPr>
           <p:cNvSpPr/>
           <p:nvPr/>
         </p:nvSpPr>
         <p:spPr>
           <a:xfrm>
             <a:off x="6167628" y="2633472"/>
-            <a:ext cx="54864" cy="1005840"/>
-          </a:xfrm>
-          <a:prstGeom prst="roundRect">
-            <a:avLst>
-              <a:gd name="adj" fmla="val 20000"/>
-            </a:avLst>
-          </a:prstGeom>
-          <a:solidFill>
-            <a:srgbClr val="010B13"/>
-          </a:solidFill>
-          <a:ln>
-            <a:noFill/>
-          </a:ln>
-        </p:spPr>
-        <p:txBody>
-          <a:bodyPr lIns="182880" tIns="182880" rIns="182880" bIns="182880" anchor="t" wrap="square">
-            <a:normAutofit/>
-          </a:bodyPr>
-          <a:lstStyle/>
-          <a:p/>
-        </p:txBody>
-      </p:sp>
-      <p:sp>
-        <p:nvSpPr>
-          <p:cNvPr id="1005" name="card-steel" descr="card: SPSS guides. Between-groups factorial Mixed factorial"/>
-          <p:cNvSpPr/>
-          <p:nvPr/>
-        </p:nvSpPr>
-        <p:spPr>
-          <a:xfrm>
-            <a:off x="1097280" y="3785616"/>
-            <a:ext cx="4924044" cy="1310640"/>
-          </a:xfrm>
-          <a:prstGeom prst="roundRect">
-            <a:avLst>
-              <a:gd name="adj" fmla="val 6000"/>
-            </a:avLst>
-          </a:prstGeom>
-          <a:solidFill>
-            <a:srgbClr val="FEFDFA"/>
-          </a:solidFill>
-          <a:ln w="19050">
-            <a:solidFill>
-              <a:srgbClr val="CCCCCC"/>
-            </a:solidFill>
-          </a:ln>
-        </p:spPr>
-        <p:txBody>
-          <a:bodyPr lIns="182880" tIns="182880" rIns="182880" bIns="182880" anchor="t" wrap="square">
-            <a:normAutofit/>
-          </a:bodyPr>
-          <a:lstStyle/>
-          <a:p>
-            <a:pPr algn="l"/>
-            <a:r>
-              <a:rPr lang="en-US" sz="2200" b="1" dirty="0">
-                <a:solidFill>
-                  <a:srgbClr val="010B13"/>
-                </a:solidFill>
-              </a:rPr>
-              <a:t>SPSS guides</a:t>
-            </a:r>
-          </a:p>
-          <a:p>
-            <a:pPr algn="l"/>
-            <a:r>
-              <a:rPr lang="en-US" sz="2000" b="0" dirty="0">
-                <a:solidFill>
-                  <a:srgbClr val="010B13"/>
-                </a:solidFill>
-                <a:hlinkClick r:id="rId5"/>
-              </a:rPr>
-              <a:t>Between-groups factorial</a:t>
-            </a:r>
-          </a:p>
-          <a:p>
-            <a:pPr algn="l"/>
-            <a:r>
-              <a:rPr lang="en-US" sz="2000" b="0" dirty="0">
-                <a:solidFill>
-                  <a:srgbClr val="010B13"/>
-                </a:solidFill>
-                <a:hlinkClick r:id="rId6"/>
-              </a:rPr>
-              <a:t>Mixed factorial</a:t>
-            </a:r>
-          </a:p>
-        </p:txBody>
-      </p:sp>
-      <p:sp>
-        <p:nvSpPr>
-          <p:cNvPr id="1006" name="card-rail" descr=""/>
-          <p:cNvSpPr/>
-          <p:nvPr/>
-        </p:nvSpPr>
-        <p:spPr>
-          <a:xfrm>
-            <a:off x="1097280" y="3785616"/>
-            <a:ext cx="54864" cy="1310640"/>
-          </a:xfrm>
-          <a:prstGeom prst="roundRect">
-            <a:avLst>
-              <a:gd name="adj" fmla="val 20000"/>
-            </a:avLst>
-          </a:prstGeom>
-          <a:solidFill>
-            <a:srgbClr val="010B13"/>
-          </a:solidFill>
-          <a:ln>
-            <a:noFill/>
-          </a:ln>
-        </p:spPr>
-        <p:txBody>
-          <a:bodyPr lIns="182880" tIns="182880" rIns="182880" bIns="182880" anchor="t" wrap="square">
-            <a:normAutofit/>
-          </a:bodyPr>
-          <a:lstStyle/>
-          <a:p/>
-        </p:txBody>
-      </p:sp>
-      <p:sp>
-        <p:nvSpPr>
-          <p:cNvPr id="1007" name="card-steel" descr="card: Comparison calculator. Download Computator"/>
-          <p:cNvSpPr/>
-          <p:nvPr/>
-        </p:nvSpPr>
-        <p:spPr>
-          <a:xfrm>
-            <a:off x="6167628" y="3785616"/>
-            <a:ext cx="4924044" cy="1005840"/>
-          </a:xfrm>
-          <a:prstGeom prst="roundRect">
-            <a:avLst>
-              <a:gd name="adj" fmla="val 6000"/>
-            </a:avLst>
-          </a:prstGeom>
-          <a:solidFill>
-            <a:srgbClr val="FEFDFA"/>
-          </a:solidFill>
-          <a:ln w="19050">
-            <a:solidFill>
-              <a:srgbClr val="CCCCCC"/>
-            </a:solidFill>
-          </a:ln>
-        </p:spPr>
-        <p:txBody>
-          <a:bodyPr lIns="182880" tIns="182880" rIns="182880" bIns="182880" anchor="t" wrap="square">
-            <a:normAutofit/>
-          </a:bodyPr>
-          <a:lstStyle/>
-          <a:p>
-            <a:pPr algn="l"/>
-            <a:r>
-              <a:rPr lang="en-US" sz="2200" b="1" dirty="0">
-                <a:solidFill>
-                  <a:srgbClr val="010B13"/>
-                </a:solidFill>
-              </a:rPr>
-              <a:t>Comparison calculator</a:t>
-            </a:r>
-          </a:p>
-          <a:p>
-            <a:pPr algn="l"/>
-            <a:r>
-              <a:rPr lang="en-US" sz="2000" b="0" dirty="0">
-                <a:solidFill>
-                  <a:srgbClr val="010B13"/>
-                </a:solidFill>
-                <a:hlinkClick r:id="rId7"/>
-              </a:rPr>
-              <a:t>Download Computator</a:t>
-            </a:r>
-          </a:p>
-        </p:txBody>
-      </p:sp>
-      <p:sp>
-        <p:nvSpPr>
-          <p:cNvPr id="1008" name="card-rail" descr=""/>
-          <p:cNvSpPr/>
-          <p:nvPr/>
-        </p:nvSpPr>
-        <p:spPr>
-          <a:xfrm>
-            <a:off x="6167628" y="3785616"/>
             <a:ext cx="54864" cy="1005840"/>
           </a:xfrm>
           <a:prstGeom prst="roundRect">
@@ -5771,7 +5827,7 @@
       </p:grpSpPr>
       <p:sp>
         <p:nvSpPr>
-          <p:cNvPr id="10" name="Title 9"/>
+          <p:cNvPr id="2" name="Title 1"/>
           <p:cNvSpPr>
             <a:spLocks noGrp="1"/>
           </p:cNvSpPr>
@@ -5779,7 +5835,12 @@
             <p:ph type="title"/>
           </p:nvPr>
         </p:nvSpPr>
-        <p:spPr/>
+        <p:spPr>
+          <a:xfrm>
+            <a:off x="1097280" y="964692"/>
+            <a:ext cx="9997440" cy="1188720"/>
+          </a:xfrm>
+        </p:spPr>
         <p:txBody>
           <a:bodyPr/>
           <a:lstStyle/>
@@ -5789,19 +5850,19 @@
             </a:pPr>
             <a:r>
               <a:rPr/>
-              <a:t>2 Keep Data and Syntax Editors open</a:t>
-            </a:r>
-          </a:p>
-        </p:txBody>
-      </p:sp>
-      <p:sp>
-        <p:nvSpPr>
-          <p:cNvPr id="3" name="Text Placeholder 2"/>
-          <p:cNvSpPr>
-            <a:spLocks noGrp="1"/>
-          </p:cNvSpPr>
-          <p:nvPr>
-            <p:ph idx="1" type="body"/>
+              <a:t>2 Identify the four groups</a:t>
+            </a:r>
+          </a:p>
+        </p:txBody>
+      </p:sp>
+      <p:sp>
+        <p:nvSpPr>
+          <p:cNvPr id="3" name="Content Placeholder 2"/>
+          <p:cNvSpPr>
+            <a:spLocks noGrp="1"/>
+          </p:cNvSpPr>
+          <p:nvPr>
+            <p:ph idx="1"/>
           </p:nvPr>
         </p:nvSpPr>
         <p:spPr/>
@@ -5813,143 +5874,8 @@
               <a:buNone/>
             </a:pPr>
             <a:r>
-              <a:rPr b="1"/>
-              <a:t>Data Editor</a:t>
-            </a:r>
-          </a:p>
-        </p:txBody>
-      </p:sp>
-      <p:pic>
-        <p:nvPicPr>
-          <p:cNvPr descr="Focused SPSS Data Editor image showing spreadsheet columns and the Data View and Variable View tabs" id="0" name="Picture 1"/>
-          <p:cNvPicPr>
-            <a:picLocks noGrp="1" noChangeAspect="1"/>
-          </p:cNvPicPr>
-          <p:nvPr/>
-        </p:nvPicPr>
-        <p:blipFill>
-          <a:blip r:embed="rId3"/>
-          <a:stretch>
-            <a:fillRect/>
-          </a:stretch>
-        </p:blipFill>
-        <p:spPr bwMode="auto">
-          <a:xfrm>
-            <a:off x="1574800" y="3416300"/>
-            <a:ext cx="4267200" cy="2032000"/>
-          </a:xfrm>
-          <a:prstGeom prst="rect">
-            <a:avLst/>
-          </a:prstGeom>
-          <a:noFill/>
-          <a:ln w="9525">
-            <a:noFill/>
-            <a:headEnd/>
-            <a:tailEnd/>
-          </a:ln>
-        </p:spPr>
-      </p:pic>
-      <p:sp>
-        <p:nvSpPr>
-          <p:cNvPr id="4" name="Content Placeholder 3"/>
-          <p:cNvSpPr>
-            <a:spLocks noGrp="1"/>
-          </p:cNvSpPr>
-          <p:nvPr>
-            <p:ph idx="2" sz="half"/>
-          </p:nvPr>
-        </p:nvSpPr>
-        <p:spPr/>
-        <p:txBody>
-          <a:bodyPr/>
-          <a:lstStyle/>
-          <a:p>
-            <a:pPr lvl="0" indent="0" marL="0">
-              <a:buNone/>
-            </a:pPr>
-            <a:r>
-              <a:rPr b="1"/>
-              <a:t>Inspect predictors and outcomes</a:t>
-            </a:r>
-          </a:p>
-        </p:txBody>
-      </p:sp>
-      <p:sp>
-        <p:nvSpPr>
-          <p:cNvPr id="11" name="Text Placeholder 4"/>
-          <p:cNvSpPr>
-            <a:spLocks noGrp="1"/>
-          </p:cNvSpPr>
-          <p:nvPr>
-            <p:ph idx="13" sz="quarter" type="body"/>
-          </p:nvPr>
-        </p:nvSpPr>
-        <p:spPr/>
-        <p:txBody>
-          <a:bodyPr/>
-          <a:lstStyle/>
-          <a:p>
-            <a:pPr lvl="0" indent="0" marL="0">
-              <a:buNone/>
-            </a:pPr>
-            <a:r>
-              <a:rPr b="1"/>
-              <a:t>Syntax Editor</a:t>
-            </a:r>
-          </a:p>
-        </p:txBody>
-      </p:sp>
-      <p:pic>
-        <p:nvPicPr>
-          <p:cNvPr descr="Focused SPSS Syntax Editor image showing the command area and an annotation pointing to the green Run button" id="0" name="Picture 1"/>
-          <p:cNvPicPr>
-            <a:picLocks noGrp="1" noChangeAspect="1"/>
-          </p:cNvPicPr>
-          <p:nvPr/>
-        </p:nvPicPr>
-        <p:blipFill>
-          <a:blip r:embed="rId4"/>
-          <a:stretch>
-            <a:fillRect/>
-          </a:stretch>
-        </p:blipFill>
-        <p:spPr bwMode="auto">
-          <a:xfrm>
-            <a:off x="6337300" y="3429000"/>
-            <a:ext cx="4241800" cy="2006600"/>
-          </a:xfrm>
-          <a:prstGeom prst="rect">
-            <a:avLst/>
-          </a:prstGeom>
-          <a:noFill/>
-          <a:ln w="9525">
-            <a:noFill/>
-            <a:headEnd/>
-            <a:tailEnd/>
-          </a:ln>
-        </p:spPr>
-      </p:pic>
-      <p:sp>
-        <p:nvSpPr>
-          <p:cNvPr id="6" name="Content Placeholder 5"/>
-          <p:cNvSpPr>
-            <a:spLocks noGrp="1"/>
-          </p:cNvSpPr>
-          <p:nvPr>
-            <p:ph idx="4" sz="quarter"/>
-          </p:nvPr>
-        </p:nvSpPr>
-        <p:spPr/>
-        <p:txBody>
-          <a:bodyPr/>
-          <a:lstStyle/>
-          <a:p>
-            <a:pPr lvl="0" indent="0" marL="0">
-              <a:buNone/>
-            </a:pPr>
-            <a:r>
-              <a:rPr b="1"/>
-              <a:t>Save and rerun commands</a:t>
+              <a:rPr/>
+              <a:t>[RH1 · Step 1]</a:t>
             </a:r>
           </a:p>
         </p:txBody>
@@ -6001,41 +5927,184 @@
             </a:pPr>
             <a:r>
               <a:rPr/>
-              <a:t>3 Read results in Output Viewer</a:t>
-            </a:r>
-          </a:p>
-        </p:txBody>
-      </p:sp>
-      <p:pic>
-        <p:nvPicPr>
-          <p:cNvPr descr="SPSS-style factorial ANOVA output for praise by family type and treatment, showing significant family-type and treatment main effects and a significant family-type by treatment interaction" id="0" name="Picture 1"/>
-          <p:cNvPicPr>
-            <a:picLocks noGrp="1" noChangeAspect="1"/>
-          </p:cNvPicPr>
-          <p:nvPr/>
-        </p:nvPicPr>
-        <p:blipFill>
-          <a:blip r:embed="rId3"/>
-          <a:stretch>
-            <a:fillRect/>
-          </a:stretch>
-        </p:blipFill>
-        <p:spPr bwMode="auto">
-          <a:xfrm>
-            <a:off x="2616200" y="2628900"/>
-            <a:ext cx="6946900" cy="3098800"/>
-          </a:xfrm>
-          <a:prstGeom prst="rect">
-            <a:avLst/>
-          </a:prstGeom>
-          <a:noFill/>
-          <a:ln w="9525">
-            <a:noFill/>
-            <a:headEnd/>
-            <a:tailEnd/>
-          </a:ln>
-        </p:spPr>
-      </p:pic>
+              <a:t>2 Identify the four groups (continued)</a:t>
+            </a:r>
+          </a:p>
+        </p:txBody>
+      </p:sp>
+      <p:graphicFrame>
+        <p:nvGraphicFramePr>
+          <p:cNvPr id="6" name="Content Placeholder 5"/>
+          <p:cNvGraphicFramePr>
+            <a:graphicFrameLocks noGrp="1"/>
+          </p:cNvGraphicFramePr>
+          <p:nvPr>
+            <p:ph idx="1"/>
+          </p:nvPr>
+        </p:nvGraphicFramePr>
+        <p:xfrm>
+          <a:off x="1092200" y="2628900"/>
+          <a:ext cx="9994900" cy="3098800"/>
+        </p:xfrm>
+        <a:graphic>
+          <a:graphicData uri="http://schemas.openxmlformats.org/drawingml/2006/table">
+            <a:tbl>
+              <a:tblPr firstRow="1" bandRow="1">
+                <a:tableStyleId>{5C22544A-7EE6-4342-B048-85BDC9FD1C3A}</a:tableStyleId>
+              </a:tblPr>
+              <a:tblGrid>
+                <a:gridCol w="3327400"/>
+                <a:gridCol w="3327400"/>
+                <a:gridCol w="3327400"/>
+              </a:tblGrid>
+              <a:tr h="0">
+                <a:tc>
+                  <a:txBody>
+                    <a:bodyPr/>
+                    <a:lstStyle/>
+                    <a:p>
+                      <a:pPr lvl="0" indent="0" marL="0">
+                        <a:buNone/>
+                      </a:pPr>
+                      <a:r>
+                        <a:rPr/>
+                        <a:t>Family type</a:t>
+                      </a:r>
+                    </a:p>
+                  </a:txBody>
+                  <a:tcPr/>
+                </a:tc>
+                <a:tc>
+                  <a:txBody>
+                    <a:bodyPr/>
+                    <a:lstStyle/>
+                    <a:p>
+                      <a:pPr lvl="0" indent="0" marL="0">
+                        <a:buNone/>
+                      </a:pPr>
+                      <a:r>
+                        <a:rPr/>
+                        <a:t>No treatment</a:t>
+                      </a:r>
+                    </a:p>
+                  </a:txBody>
+                  <a:tcPr/>
+                </a:tc>
+                <a:tc>
+                  <a:txBody>
+                    <a:bodyPr/>
+                    <a:lstStyle/>
+                    <a:p>
+                      <a:pPr lvl="0" indent="0" marL="0">
+                        <a:buNone/>
+                      </a:pPr>
+                      <a:r>
+                        <a:rPr/>
+                        <a:t>Treatment</a:t>
+                      </a:r>
+                    </a:p>
+                  </a:txBody>
+                  <a:tcPr/>
+                </a:tc>
+              </a:tr>
+              <a:tr h="0">
+                <a:tc>
+                  <a:txBody>
+                    <a:bodyPr/>
+                    <a:lstStyle/>
+                    <a:p>
+                      <a:pPr lvl="0" indent="0" marL="0">
+                        <a:buNone/>
+                      </a:pPr>
+                      <a:r>
+                        <a:rPr/>
+                        <a:t>2-parent family</a:t>
+                      </a:r>
+                    </a:p>
+                  </a:txBody>
+                </a:tc>
+                <a:tc>
+                  <a:txBody>
+                    <a:bodyPr/>
+                    <a:lstStyle/>
+                    <a:p>
+                      <a:pPr lvl="0" indent="0" marL="0">
+                        <a:buNone/>
+                      </a:pPr>
+                      <a:r>
+                        <a:rPr/>
+                        <a:t>Mean praise</a:t>
+                      </a:r>
+                    </a:p>
+                  </a:txBody>
+                </a:tc>
+                <a:tc>
+                  <a:txBody>
+                    <a:bodyPr/>
+                    <a:lstStyle/>
+                    <a:p>
+                      <a:pPr lvl="0" indent="0" marL="0">
+                        <a:buNone/>
+                      </a:pPr>
+                      <a:r>
+                        <a:rPr/>
+                        <a:t>Mean praise</a:t>
+                      </a:r>
+                    </a:p>
+                  </a:txBody>
+                </a:tc>
+              </a:tr>
+              <a:tr h="0">
+                <a:tc>
+                  <a:txBody>
+                    <a:bodyPr/>
+                    <a:lstStyle/>
+                    <a:p>
+                      <a:pPr lvl="0" indent="0" marL="0">
+                        <a:buNone/>
+                      </a:pPr>
+                      <a:r>
+                        <a:rPr/>
+                        <a:t>Mother-only family</a:t>
+                      </a:r>
+                    </a:p>
+                  </a:txBody>
+                </a:tc>
+                <a:tc>
+                  <a:txBody>
+                    <a:bodyPr/>
+                    <a:lstStyle/>
+                    <a:p>
+                      <a:pPr lvl="0" indent="0" marL="0">
+                        <a:buNone/>
+                      </a:pPr>
+                      <a:r>
+                        <a:rPr/>
+                        <a:t>Mean praise</a:t>
+                      </a:r>
+                    </a:p>
+                  </a:txBody>
+                </a:tc>
+                <a:tc>
+                  <a:txBody>
+                    <a:bodyPr/>
+                    <a:lstStyle/>
+                    <a:p>
+                      <a:pPr lvl="0" indent="0" marL="0">
+                        <a:buNone/>
+                      </a:pPr>
+                      <a:r>
+                        <a:rPr/>
+                        <a:t>Mean praise</a:t>
+                      </a:r>
+                    </a:p>
+                  </a:txBody>
+                </a:tc>
+              </a:tr>
+            </a:tbl>
+          </a:graphicData>
+        </a:graphic>
+      </p:graphicFrame>
     </p:spTree>
   </p:cSld>
 </p:sld>
@@ -6083,178 +6152,36 @@
             </a:pPr>
             <a:r>
               <a:rPr/>
-              <a:t>4 A 2-by-2 has four cell means</a:t>
-            </a:r>
-          </a:p>
-        </p:txBody>
-      </p:sp>
-      <p:graphicFrame>
-        <p:nvGraphicFramePr>
-          <p:cNvPr id="6" name="Content Placeholder 5"/>
-          <p:cNvGraphicFramePr>
-            <a:graphicFrameLocks noGrp="1"/>
-          </p:cNvGraphicFramePr>
+              <a:t>2 Identify the four groups (continued 2)</a:t>
+            </a:r>
+          </a:p>
+        </p:txBody>
+      </p:sp>
+      <p:sp>
+        <p:nvSpPr>
+          <p:cNvPr id="3" name="Content Placeholder 2"/>
+          <p:cNvSpPr>
+            <a:spLocks noGrp="1"/>
+          </p:cNvSpPr>
           <p:nvPr>
             <p:ph idx="1"/>
           </p:nvPr>
-        </p:nvGraphicFramePr>
-        <p:xfrm>
-          <a:off x="1092200" y="2628900"/>
-          <a:ext cx="9994900" cy="3098800"/>
-        </p:xfrm>
-        <a:graphic>
-          <a:graphicData uri="http://schemas.openxmlformats.org/drawingml/2006/table">
-            <a:tbl>
-              <a:tblPr firstRow="1" bandRow="1">
-                <a:tableStyleId>{5C22544A-7EE6-4342-B048-85BDC9FD1C3A}</a:tableStyleId>
-              </a:tblPr>
-              <a:tblGrid>
-                <a:gridCol w="3327400"/>
-                <a:gridCol w="3327400"/>
-                <a:gridCol w="3327400"/>
-              </a:tblGrid>
-              <a:tr h="0">
-                <a:tc>
-                  <a:txBody>
-                    <a:bodyPr/>
-                    <a:lstStyle/>
-                    <a:p>
-                      <a:endParaRPr/>
-                    </a:p>
-                  </a:txBody>
-                  <a:tcPr/>
-                </a:tc>
-                <a:tc>
-                  <a:txBody>
-                    <a:bodyPr/>
-                    <a:lstStyle/>
-                    <a:p>
-                      <a:pPr lvl="0" indent="0" marL="0" algn="r">
-                        <a:buNone/>
-                      </a:pPr>
-                      <a:r>
-                        <a:rPr/>
-                        <a:t>B1</a:t>
-                      </a:r>
-                    </a:p>
-                  </a:txBody>
-                  <a:tcPr/>
-                </a:tc>
-                <a:tc>
-                  <a:txBody>
-                    <a:bodyPr/>
-                    <a:lstStyle/>
-                    <a:p>
-                      <a:pPr lvl="0" indent="0" marL="0" algn="r">
-                        <a:buNone/>
-                      </a:pPr>
-                      <a:r>
-                        <a:rPr/>
-                        <a:t>B2</a:t>
-                      </a:r>
-                    </a:p>
-                  </a:txBody>
-                  <a:tcPr/>
-                </a:tc>
-              </a:tr>
-              <a:tr h="0">
-                <a:tc>
-                  <a:txBody>
-                    <a:bodyPr/>
-                    <a:lstStyle/>
-                    <a:p>
-                      <a:pPr lvl="0" indent="0" marL="0">
-                        <a:buNone/>
-                      </a:pPr>
-                      <a:r>
-                        <a:rPr/>
-                        <a:t>A1</a:t>
-                      </a:r>
-                    </a:p>
-                  </a:txBody>
-                </a:tc>
-                <a:tc>
-                  <a:txBody>
-                    <a:bodyPr/>
-                    <a:lstStyle/>
-                    <a:p>
-                      <a:pPr lvl="0" indent="0" marL="0" algn="r">
-                        <a:buNone/>
-                      </a:pPr>
-                      <a:r>
-                        <a:rPr/>
-                        <a:t>cell mean</a:t>
-                      </a:r>
-                    </a:p>
-                  </a:txBody>
-                </a:tc>
-                <a:tc>
-                  <a:txBody>
-                    <a:bodyPr/>
-                    <a:lstStyle/>
-                    <a:p>
-                      <a:pPr lvl="0" indent="0" marL="0" algn="r">
-                        <a:buNone/>
-                      </a:pPr>
-                      <a:r>
-                        <a:rPr/>
-                        <a:t>cell mean</a:t>
-                      </a:r>
-                    </a:p>
-                  </a:txBody>
-                </a:tc>
-              </a:tr>
-              <a:tr h="0">
-                <a:tc>
-                  <a:txBody>
-                    <a:bodyPr/>
-                    <a:lstStyle/>
-                    <a:p>
-                      <a:pPr lvl="0" indent="0" marL="0">
-                        <a:buNone/>
-                      </a:pPr>
-                      <a:r>
-                        <a:rPr/>
-                        <a:t>A2</a:t>
-                      </a:r>
-                    </a:p>
-                  </a:txBody>
-                </a:tc>
-                <a:tc>
-                  <a:txBody>
-                    <a:bodyPr/>
-                    <a:lstStyle/>
-                    <a:p>
-                      <a:pPr lvl="0" indent="0" marL="0" algn="r">
-                        <a:buNone/>
-                      </a:pPr>
-                      <a:r>
-                        <a:rPr/>
-                        <a:t>cell mean</a:t>
-                      </a:r>
-                    </a:p>
-                  </a:txBody>
-                </a:tc>
-                <a:tc>
-                  <a:txBody>
-                    <a:bodyPr/>
-                    <a:lstStyle/>
-                    <a:p>
-                      <a:pPr lvl="0" indent="0" marL="0" algn="r">
-                        <a:buNone/>
-                      </a:pPr>
-                      <a:r>
-                        <a:rPr/>
-                        <a:t>cell mean</a:t>
-                      </a:r>
-                    </a:p>
-                  </a:txBody>
-                </a:tc>
-              </a:tr>
-            </a:tbl>
-          </a:graphicData>
-        </a:graphic>
-      </p:graphicFrame>
+        </p:nvSpPr>
+        <p:spPr/>
+        <p:txBody>
+          <a:bodyPr/>
+          <a:lstStyle/>
+          <a:p>
+            <a:pPr lvl="0" indent="0" marL="0">
+              <a:buNone/>
+            </a:pPr>
+            <a:r>
+              <a:rPr b="1"/>
+              <a:t>What are the two main effects and the interaction?</a:t>
+            </a:r>
+          </a:p>
+        </p:txBody>
+      </p:sp>
     </p:spTree>
   </p:cSld>
 </p:sld>
@@ -6279,7 +6206,7 @@
       </p:grpSpPr>
       <p:sp>
         <p:nvSpPr>
-          <p:cNvPr id="2" name="Title 1"/>
+          <p:cNvPr id="10" name="Title 9"/>
           <p:cNvSpPr>
             <a:spLocks noGrp="1"/>
           </p:cNvSpPr>
@@ -6302,19 +6229,19 @@
             </a:pPr>
             <a:r>
               <a:rPr/>
-              <a:t>4 A 2-by-2 has four cell means (continued)</a:t>
-            </a:r>
-          </a:p>
-        </p:txBody>
-      </p:sp>
-      <p:sp>
-        <p:nvSpPr>
-          <p:cNvPr id="3" name="Content Placeholder 2"/>
-          <p:cNvSpPr>
-            <a:spLocks noGrp="1"/>
-          </p:cNvSpPr>
-          <p:nvPr>
-            <p:ph idx="1"/>
+              <a:t>3 Look for a changing difference</a:t>
+            </a:r>
+          </a:p>
+        </p:txBody>
+      </p:sp>
+      <p:sp>
+        <p:nvSpPr>
+          <p:cNvPr id="3" name="Text Placeholder 2"/>
+          <p:cNvSpPr>
+            <a:spLocks noGrp="1"/>
+          </p:cNvSpPr>
+          <p:nvPr>
+            <p:ph idx="1" type="body"/>
           </p:nvPr>
         </p:nvSpPr>
         <p:spPr/>
@@ -6326,20 +6253,97 @@
               <a:buNone/>
             </a:pPr>
             <a:r>
-              <a:rPr/>
-              <a:t>SPSS estimated marginal means give </a:t>
-            </a:r>
-            <a:r>
               <a:rPr b="1"/>
-              <a:t>equal weight</a:t>
-            </a:r>
-            <a:r>
-              <a:rPr/>
-              <a:t> to both levels of the other factor.</a:t>
-            </a:r>
-          </a:p>
-        </p:txBody>
-      </p:sp>
+              <a:t>Same difference</a:t>
+            </a:r>
+          </a:p>
+        </p:txBody>
+      </p:sp>
+      <p:pic>
+        <p:nvPicPr>
+          <p:cNvPr descr="Illustrative parallel lines: A1 is above A2 by the same amount at B1 and B2" id="0" name="Picture 1"/>
+          <p:cNvPicPr>
+            <a:picLocks noGrp="1" noChangeAspect="1"/>
+          </p:cNvPicPr>
+          <p:nvPr/>
+        </p:nvPicPr>
+        <p:blipFill>
+          <a:blip r:embed="rId2"/>
+          <a:stretch>
+            <a:fillRect/>
+          </a:stretch>
+        </p:blipFill>
+        <p:spPr bwMode="auto">
+          <a:xfrm>
+            <a:off x="1130300" y="2921000"/>
+            <a:ext cx="4813300" cy="3175000"/>
+          </a:xfrm>
+          <a:prstGeom prst="rect">
+            <a:avLst/>
+          </a:prstGeom>
+          <a:noFill/>
+          <a:ln w="9525">
+            <a:noFill/>
+            <a:headEnd/>
+            <a:tailEnd/>
+          </a:ln>
+        </p:spPr>
+      </p:pic>
+      <p:sp>
+        <p:nvSpPr>
+          <p:cNvPr id="11" name="Text Placeholder 4"/>
+          <p:cNvSpPr>
+            <a:spLocks noGrp="1"/>
+          </p:cNvSpPr>
+          <p:nvPr>
+            <p:ph idx="13" sz="quarter" type="body"/>
+          </p:nvPr>
+        </p:nvSpPr>
+        <p:spPr/>
+        <p:txBody>
+          <a:bodyPr/>
+          <a:lstStyle/>
+          <a:p>
+            <a:pPr lvl="0" indent="0" marL="0">
+              <a:buNone/>
+            </a:pPr>
+            <a:r>
+              <a:rPr b="1"/>
+              <a:t>Direction reverses</a:t>
+            </a:r>
+          </a:p>
+        </p:txBody>
+      </p:sp>
+      <p:pic>
+        <p:nvPicPr>
+          <p:cNvPr descr="Illustrative crossing lines: A1 is above A2 at B1 but below A2 at B2" id="0" name="Picture 1"/>
+          <p:cNvPicPr>
+            <a:picLocks noGrp="1" noChangeAspect="1"/>
+          </p:cNvPicPr>
+          <p:nvPr/>
+        </p:nvPicPr>
+        <p:blipFill>
+          <a:blip r:embed="rId3"/>
+          <a:stretch>
+            <a:fillRect/>
+          </a:stretch>
+        </p:blipFill>
+        <p:spPr bwMode="auto">
+          <a:xfrm>
+            <a:off x="6223000" y="2921000"/>
+            <a:ext cx="4813300" cy="3175000"/>
+          </a:xfrm>
+          <a:prstGeom prst="rect">
+            <a:avLst/>
+          </a:prstGeom>
+          <a:noFill/>
+          <a:ln w="9525">
+            <a:noFill/>
+            <a:headEnd/>
+            <a:tailEnd/>
+          </a:ln>
+        </p:spPr>
+      </p:pic>
     </p:spTree>
   </p:cSld>
 </p:sld>
@@ -6387,7 +6391,7 @@
             </a:pPr>
             <a:r>
               <a:rPr/>
-              <a:t>5 Test three effects</a:t>
+              <a:t>3 Look for a changing difference (continued)</a:t>
             </a:r>
           </a:p>
         </p:txBody>
@@ -6407,30 +6411,12 @@
           <a:bodyPr/>
           <a:lstStyle/>
           <a:p>
-            <a:pPr lvl="0" indent="-457200" marL="457200">
-              <a:buAutoNum type="arabicPeriod"/>
+            <a:pPr lvl="0" indent="0" marL="0">
+              <a:buNone/>
             </a:pPr>
             <a:r>
-              <a:rPr/>
-              <a:t>Main effect of A</a:t>
-            </a:r>
-          </a:p>
-          <a:p>
-            <a:pPr lvl="0" indent="-457200" marL="457200">
-              <a:buAutoNum type="arabicPeriod"/>
-            </a:pPr>
-            <a:r>
-              <a:rPr/>
-              <a:t>Main effect of B</a:t>
-            </a:r>
-          </a:p>
-          <a:p>
-            <a:pPr lvl="0" indent="-457200" marL="457200">
-              <a:buAutoNum type="arabicPeriod"/>
-            </a:pPr>
-            <a:r>
-              <a:rPr/>
-              <a:t>A × B interaction</a:t>
+              <a:rPr b="1"/>
+              <a:t>An interaction can change the size or direction of a difference</a:t>
             </a:r>
           </a:p>
         </p:txBody>
@@ -6459,7 +6445,7 @@
       </p:grpSpPr>
       <p:sp>
         <p:nvSpPr>
-          <p:cNvPr id="10" name="Title 9"/>
+          <p:cNvPr id="2" name="Title 1"/>
           <p:cNvSpPr>
             <a:spLocks noGrp="1"/>
           </p:cNvSpPr>
@@ -6467,7 +6453,12 @@
             <p:ph type="title"/>
           </p:nvPr>
         </p:nvSpPr>
-        <p:spPr/>
+        <p:spPr>
+          <a:xfrm>
+            <a:off x="1097280" y="964692"/>
+            <a:ext cx="9997440" cy="1188720"/>
+          </a:xfrm>
+        </p:spPr>
         <p:txBody>
           <a:bodyPr/>
           <a:lstStyle/>
@@ -6477,127 +6468,50 @@
             </a:pPr>
             <a:r>
               <a:rPr/>
-              <a:t>6 Interaction changes the story</a:t>
-            </a:r>
-          </a:p>
-        </p:txBody>
-      </p:sp>
-      <p:sp>
-        <p:nvSpPr>
-          <p:cNvPr id="3" name="Text Placeholder 2"/>
-          <p:cNvSpPr>
-            <a:spLocks noGrp="1"/>
-          </p:cNvSpPr>
-          <p:nvPr>
-            <p:ph idx="1" type="body"/>
-          </p:nvPr>
-        </p:nvSpPr>
-        <p:spPr/>
-        <p:txBody>
-          <a:bodyPr/>
-          <a:lstStyle/>
+              <a:t>4 Prepare the RH1 variables</a:t>
+            </a:r>
+          </a:p>
+        </p:txBody>
+      </p:sp>
+      <p:sp>
+        <p:nvSpPr>
+          <p:cNvPr id="3" name="Content Placeholder 2"/>
+          <p:cNvSpPr>
+            <a:spLocks noGrp="1"/>
+          </p:cNvSpPr>
+          <p:nvPr>
+            <p:ph idx="1"/>
+          </p:nvPr>
+        </p:nvSpPr>
+        <p:spPr/>
+        <p:txBody>
+          <a:bodyPr/>
+          <a:lstStyle/>
+          <a:p>
+            <a:pPr lvl="0" indent="0">
+              <a:buNone/>
+            </a:pPr>
+            <a:r>
+              <a:rPr>
+                <a:latin typeface="Courier"/>
+              </a:rPr>
+              <a:t>FILTER OFF.
+USE ALL.
+FREQUENCIES VARIABLES=famtype tx.
+DESCRIPTIVES VARIABLES=praise.</a:t>
+            </a:r>
+          </a:p>
           <a:p>
             <a:pPr lvl="0" indent="0" marL="0">
-              <a:spcBef>
-                <a:spcPts val="3000"/>
-              </a:spcBef>
               <a:buNone/>
             </a:pPr>
             <a:r>
               <a:rPr b="1"/>
-              <a:t>Parallel slopes</a:t>
-            </a:r>
-          </a:p>
-        </p:txBody>
-      </p:sp>
-      <p:pic>
-        <p:nvPicPr>
-          <p:cNvPr descr="Two large parallel lines across B1 and B2, indicating no interaction between A and B" id="0" name="Picture 1"/>
-          <p:cNvPicPr>
-            <a:picLocks noGrp="1" noChangeAspect="1"/>
-          </p:cNvPicPr>
-          <p:nvPr/>
-        </p:nvPicPr>
-        <p:blipFill>
-          <a:blip r:embed="rId3"/>
-          <a:stretch>
-            <a:fillRect/>
-          </a:stretch>
-        </p:blipFill>
-        <p:spPr bwMode="auto">
-          <a:xfrm>
-            <a:off x="1739900" y="3136900"/>
-            <a:ext cx="3937000" cy="2590800"/>
-          </a:xfrm>
-          <a:prstGeom prst="rect">
-            <a:avLst/>
-          </a:prstGeom>
-          <a:noFill/>
-          <a:ln w="9525">
-            <a:noFill/>
-            <a:headEnd/>
-            <a:tailEnd/>
-          </a:ln>
-        </p:spPr>
-      </p:pic>
-      <p:sp>
-        <p:nvSpPr>
-          <p:cNvPr id="11" name="Text Placeholder 4"/>
-          <p:cNvSpPr>
-            <a:spLocks noGrp="1"/>
-          </p:cNvSpPr>
-          <p:nvPr>
-            <p:ph idx="13" sz="quarter" type="body"/>
-          </p:nvPr>
-        </p:nvSpPr>
-        <p:spPr/>
-        <p:txBody>
-          <a:bodyPr/>
-          <a:lstStyle/>
-          <a:p>
-            <a:pPr lvl="0" indent="0" marL="0">
-              <a:spcBef>
-                <a:spcPts val="3000"/>
-              </a:spcBef>
-              <a:buNone/>
-            </a:pPr>
-            <a:r>
-              <a:rPr b="1"/>
-              <a:t>Crossing slopes</a:t>
-            </a:r>
-          </a:p>
-        </p:txBody>
-      </p:sp>
-      <p:pic>
-        <p:nvPicPr>
-          <p:cNvPr descr="Two large lines crossing between B1 and B2, indicating that the direction of A's effect reverses across B" id="0" name="Picture 1"/>
-          <p:cNvPicPr>
-            <a:picLocks noGrp="1" noChangeAspect="1"/>
-          </p:cNvPicPr>
-          <p:nvPr/>
-        </p:nvPicPr>
-        <p:blipFill>
-          <a:blip r:embed="rId4"/>
-          <a:stretch>
-            <a:fillRect/>
-          </a:stretch>
-        </p:blipFill>
-        <p:spPr bwMode="auto">
-          <a:xfrm>
-            <a:off x="6489700" y="3136900"/>
-            <a:ext cx="3937000" cy="2590800"/>
-          </a:xfrm>
-          <a:prstGeom prst="rect">
-            <a:avLst/>
-          </a:prstGeom>
-          <a:noFill/>
-          <a:ln w="9525">
-            <a:noFill/>
-            <a:headEnd/>
-            <a:tailEnd/>
-          </a:ln>
-        </p:spPr>
-      </p:pic>
+              <a:t>Check group labels and missing values</a:t>
+            </a:r>
+          </a:p>
+        </p:txBody>
+      </p:sp>
     </p:spTree>
   </p:cSld>
 </p:sld>
@@ -6645,7 +6559,7 @@
             </a:pPr>
             <a:r>
               <a:rPr/>
-              <a:t>7 Check the walkthrough variables</a:t>
+              <a:t>5 Run the RH1 factorial model</a:t>
             </a:r>
           </a:p>
         </p:txBody>
@@ -6672,23 +6586,11 @@
               <a:rPr>
                 <a:latin typeface="Courier"/>
               </a:rPr>
-              <a:t>USE ALL.
-FILTER OFF.
-FREQUENCIES VARIABLES=famtype tx.
-DESCRIPTIVES VARIABLES=praise.</a:t>
-            </a:r>
-          </a:p>
-          <a:p>
-            <a:pPr lvl="0" indent="0" marL="0">
-              <a:buNone/>
-            </a:pPr>
-            <a:r>
-              <a:rPr b="1"/>
-              <a:t>RH1:</a:t>
-            </a:r>
-            <a:r>
-              <a:rPr/>
-              <a:t> family type × treatment status predicting praise.</a:t>
+              <a:t>UNIANOVA praise BY famtype tx
+  /METHOD=SSTYPE(3)
+  /EMMEANS=TABLES(famtype*tx)
+  /PRINT=DESCRIPTIVE
+  /DESIGN=famtype tx famtype*tx.</a:t>
             </a:r>
           </a:p>
         </p:txBody>
